--- a/01-fair-cake-cutting/slides-2-envyfree.pptx
+++ b/01-fair-cake-cutting/slides-2-envyfree.pptx
@@ -7,7 +7,7 @@
     <p:sldMasterId id="2147483674" r:id="rId3"/>
   </p:sldMasterIdLst>
   <p:notesMasterIdLst>
-    <p:notesMasterId r:id="rId21"/>
+    <p:notesMasterId r:id="rId20"/>
   </p:notesMasterIdLst>
   <p:sldIdLst>
     <p:sldId id="256" r:id="rId4"/>
@@ -23,10 +23,9 @@
     <p:sldId id="266" r:id="rId14"/>
     <p:sldId id="267" r:id="rId15"/>
     <p:sldId id="268" r:id="rId16"/>
-    <p:sldId id="269" r:id="rId17"/>
-    <p:sldId id="270" r:id="rId18"/>
-    <p:sldId id="271" r:id="rId19"/>
-    <p:sldId id="272" r:id="rId20"/>
+    <p:sldId id="270" r:id="rId17"/>
+    <p:sldId id="271" r:id="rId18"/>
+    <p:sldId id="272" r:id="rId19"/>
   </p:sldIdLst>
   <p:sldSz cx="10080625" cy="7559675"/>
   <p:notesSz cx="7772400" cy="10058400"/>
@@ -125,6 +124,11 @@
       </a:defRPr>
     </a:lvl9pPr>
   </p:defaultTextStyle>
+  <p:extLst>
+    <p:ext uri="{EFAFB233-063F-42B5-8137-9DF3F51BA10A}">
+      <p15:sldGuideLst xmlns:p15="http://schemas.microsoft.com/office/powerpoint/2012/main"/>
+    </p:ext>
+  </p:extLst>
 </p:presentation>
 </file>
 
@@ -1061,151 +1065,6 @@
       </p:grpSpPr>
       <p:sp>
         <p:nvSpPr>
-          <p:cNvPr id="399" name="PlaceHolder 1"/>
-          <p:cNvSpPr>
-            <a:spLocks noGrp="1" noRot="1" noChangeAspect="1"/>
-          </p:cNvSpPr>
-          <p:nvPr>
-            <p:ph type="sldImg"/>
-          </p:nvPr>
-        </p:nvSpPr>
-        <p:spPr>
-          <a:xfrm>
-            <a:off x="1371600" y="763588"/>
-            <a:ext cx="5029200" cy="3771900"/>
-          </a:xfrm>
-          <a:prstGeom prst="rect">
-            <a:avLst/>
-          </a:prstGeom>
-        </p:spPr>
-      </p:sp>
-      <p:sp>
-        <p:nvSpPr>
-          <p:cNvPr id="400" name="PlaceHolder 2"/>
-          <p:cNvSpPr>
-            <a:spLocks noGrp="1"/>
-          </p:cNvSpPr>
-          <p:nvPr>
-            <p:ph type="body"/>
-          </p:nvPr>
-        </p:nvSpPr>
-        <p:spPr>
-          <a:xfrm>
-            <a:off x="777960" y="4776840"/>
-            <a:ext cx="6195600" cy="4503240"/>
-          </a:xfrm>
-          <a:prstGeom prst="rect">
-            <a:avLst/>
-          </a:prstGeom>
-        </p:spPr>
-        <p:txBody>
-          <a:bodyPr lIns="0" tIns="0" rIns="0" bIns="0">
-            <a:noAutofit/>
-          </a:bodyPr>
-          <a:lstStyle/>
-          <a:p>
-            <a:endParaRPr lang="en-US" sz="2000" b="0" strike="noStrike" spc="-1">
-              <a:latin typeface="Arial"/>
-            </a:endParaRPr>
-          </a:p>
-        </p:txBody>
-      </p:sp>
-      <p:sp>
-        <p:nvSpPr>
-          <p:cNvPr id="401" name="TextShape 3"/>
-          <p:cNvSpPr txBox="1"/>
-          <p:nvPr/>
-        </p:nvSpPr>
-        <p:spPr>
-          <a:xfrm>
-            <a:off x="4398840" y="9555120"/>
-            <a:ext cx="3350880" cy="480600"/>
-          </a:xfrm>
-          <a:prstGeom prst="rect">
-            <a:avLst/>
-          </a:prstGeom>
-          <a:noFill/>
-          <a:ln w="0">
-            <a:noFill/>
-          </a:ln>
-        </p:spPr>
-        <p:txBody>
-          <a:bodyPr lIns="0" tIns="0" rIns="0" bIns="0" anchor="b">
-            <a:noAutofit/>
-          </a:bodyPr>
-          <a:lstStyle/>
-          <a:p>
-            <a:pPr algn="r">
-              <a:lnSpc>
-                <a:spcPct val="100000"/>
-              </a:lnSpc>
-              <a:tabLst>
-                <a:tab pos="0" algn="l"/>
-                <a:tab pos="457200" algn="l"/>
-                <a:tab pos="914400" algn="l"/>
-                <a:tab pos="1371600" algn="l"/>
-                <a:tab pos="1828800" algn="l"/>
-                <a:tab pos="2286000" algn="l"/>
-                <a:tab pos="2743200" algn="l"/>
-                <a:tab pos="3200400" algn="l"/>
-                <a:tab pos="3657600" algn="l"/>
-                <a:tab pos="4114800" algn="l"/>
-                <a:tab pos="4572000" algn="l"/>
-                <a:tab pos="5029200" algn="l"/>
-                <a:tab pos="5486400" algn="l"/>
-                <a:tab pos="5943600" algn="l"/>
-                <a:tab pos="6400800" algn="l"/>
-                <a:tab pos="6858000" algn="l"/>
-                <a:tab pos="7315200" algn="l"/>
-                <a:tab pos="7772400" algn="l"/>
-                <a:tab pos="8229600" algn="l"/>
-                <a:tab pos="8686800" algn="l"/>
-                <a:tab pos="9144000" algn="l"/>
-              </a:tabLst>
-            </a:pPr>
-            <a:fld id="{3DA38C44-5148-45A9-9D43-8BEE6655F143}" type="slidenum">
-              <a:rPr lang="en-US" sz="1400" b="0" strike="noStrike" spc="-1">
-                <a:solidFill>
-                  <a:srgbClr val="000000"/>
-                </a:solidFill>
-                <a:latin typeface="Times New Roman"/>
-                <a:ea typeface="DejaVu Sans"/>
-              </a:rPr>
-              <a:t>14</a:t>
-            </a:fld>
-            <a:endParaRPr lang="en-US" sz="1400" b="0" strike="noStrike" spc="-1">
-              <a:latin typeface="Times New Roman"/>
-            </a:endParaRPr>
-          </a:p>
-        </p:txBody>
-      </p:sp>
-    </p:spTree>
-  </p:cSld>
-  <p:clrMapOvr>
-    <a:masterClrMapping/>
-  </p:clrMapOvr>
-</p:notes>
-</file>
-
-<file path=ppt/notesSlides/notesSlide15.xml><?xml version="1.0" encoding="utf-8"?>
-<p:notes xmlns:a="http://schemas.openxmlformats.org/drawingml/2006/main" xmlns:r="http://schemas.openxmlformats.org/officeDocument/2006/relationships" xmlns:p="http://schemas.openxmlformats.org/presentationml/2006/main">
-  <p:cSld>
-    <p:spTree>
-      <p:nvGrpSpPr>
-        <p:cNvPr id="1" name=""/>
-        <p:cNvGrpSpPr/>
-        <p:nvPr/>
-      </p:nvGrpSpPr>
-      <p:grpSpPr>
-        <a:xfrm>
-          <a:off x="0" y="0"/>
-          <a:ext cx="0" cy="0"/>
-          <a:chOff x="0" y="0"/>
-          <a:chExt cx="0" cy="0"/>
-        </a:xfrm>
-      </p:grpSpPr>
-      <p:sp>
-        <p:nvSpPr>
           <p:cNvPr id="402" name="PlaceHolder 1"/>
           <p:cNvSpPr>
             <a:spLocks noGrp="1" noRot="1" noChangeAspect="1"/>
@@ -1316,7 +1175,7 @@
                 <a:latin typeface="Times New Roman"/>
                 <a:ea typeface="DejaVu Sans"/>
               </a:rPr>
-              <a:t>15</a:t>
+              <a:t>14</a:t>
             </a:fld>
             <a:endParaRPr lang="en-US" sz="1400" b="0" strike="noStrike" spc="-1">
               <a:latin typeface="Times New Roman"/>
@@ -1332,7 +1191,7 @@
 </p:notes>
 </file>
 
-<file path=ppt/notesSlides/notesSlide16.xml><?xml version="1.0" encoding="utf-8"?>
+<file path=ppt/notesSlides/notesSlide15.xml><?xml version="1.0" encoding="utf-8"?>
 <p:notes xmlns:a="http://schemas.openxmlformats.org/drawingml/2006/main" xmlns:r="http://schemas.openxmlformats.org/officeDocument/2006/relationships" xmlns:p="http://schemas.openxmlformats.org/presentationml/2006/main">
   <p:cSld>
     <p:spTree>
@@ -1461,7 +1320,7 @@
                 <a:latin typeface="Times New Roman"/>
                 <a:ea typeface="DejaVu Sans"/>
               </a:rPr>
-              <a:t>16</a:t>
+              <a:t>15</a:t>
             </a:fld>
             <a:endParaRPr lang="en-US" sz="1400" b="0" strike="noStrike" spc="-1">
               <a:latin typeface="Times New Roman"/>
@@ -1477,7 +1336,7 @@
 </p:notes>
 </file>
 
-<file path=ppt/notesSlides/notesSlide17.xml><?xml version="1.0" encoding="utf-8"?>
+<file path=ppt/notesSlides/notesSlide16.xml><?xml version="1.0" encoding="utf-8"?>
 <p:notes xmlns:a="http://schemas.openxmlformats.org/drawingml/2006/main" xmlns:r="http://schemas.openxmlformats.org/officeDocument/2006/relationships" xmlns:p="http://schemas.openxmlformats.org/presentationml/2006/main">
   <p:cSld>
     <p:spTree>
@@ -1606,7 +1465,7 @@
                 <a:latin typeface="Times New Roman"/>
                 <a:ea typeface="DejaVu Sans"/>
               </a:rPr>
-              <a:t>17</a:t>
+              <a:t>16</a:t>
             </a:fld>
             <a:endParaRPr lang="en-US" sz="1400" b="0" strike="noStrike" spc="-1">
               <a:latin typeface="Times New Roman"/>
@@ -9033,7 +8892,7 @@
     <mc:Choice Requires="p14">
       <p:transition spd="slow" p14:dur="3000"/>
     </mc:Choice>
-    <mc:Fallback xmlns:p15="http://schemas.microsoft.com/office/powerpoint/2012/main" xmlns="">
+    <mc:Fallback xmlns="" xmlns:p15="http://schemas.microsoft.com/office/powerpoint/2012/main">
       <p:transition spd="slow"/>
     </mc:Fallback>
   </mc:AlternateContent>
@@ -10734,11 +10593,14 @@
               <a:t>n</a:t>
             </a:r>
             <a:r>
-              <a:rPr lang="en-US" sz="3200" b="0" strike="noStrike" spc="-1">
+              <a:rPr lang="he-IL" sz="3200" b="0" i="1" strike="noStrike" spc="-1">
                 <a:latin typeface="Arial"/>
               </a:rPr>
               <a:t>.</a:t>
             </a:r>
+            <a:endParaRPr lang="en-US" sz="3200" b="0" strike="noStrike" spc="-1">
+              <a:latin typeface="Arial"/>
+            </a:endParaRPr>
           </a:p>
         </p:txBody>
       </p:sp>
@@ -10779,7 +10641,7 @@
               <a:t>בסיס</a:t>
             </a:r>
             <a:r>
-              <a:rPr lang="en-US" sz="3200" b="0" strike="noStrike" spc="-1">
+              <a:rPr lang="he-IL" sz="3200" b="0" strike="noStrike" spc="-1">
                 <a:solidFill>
                   <a:srgbClr val="000000"/>
                 </a:solidFill>
@@ -10806,13 +10668,22 @@
               <a:t>=2</a:t>
             </a:r>
             <a:r>
+              <a:rPr lang="he-IL" sz="3200" b="0" strike="noStrike" spc="-1">
+                <a:solidFill>
+                  <a:srgbClr val="000000"/>
+                </a:solidFill>
+                <a:latin typeface="Arial"/>
+              </a:rPr>
+              <a:t>. </a:t>
+            </a:r>
+            <a:r>
               <a:rPr lang="en-US" sz="3200" b="0" strike="noStrike" spc="-1">
                 <a:solidFill>
                   <a:srgbClr val="000000"/>
                 </a:solidFill>
                 <a:latin typeface="Arial"/>
               </a:rPr>
-              <a:t>. נסתכל על הצלע בין F</a:t>
+              <a:t>נסתכל על הצלע בין F</a:t>
             </a:r>
             <a:r>
               <a:rPr lang="en-US" sz="3200" b="0" strike="noStrike" spc="-1" baseline="-33000">
@@ -11547,618 +11418,6 @@
 </file>
 
 <file path=ppt/slides/slide14.xml><?xml version="1.0" encoding="utf-8"?>
-<p:sld xmlns:a="http://schemas.openxmlformats.org/drawingml/2006/main" xmlns:r="http://schemas.openxmlformats.org/officeDocument/2006/relationships" xmlns:p="http://schemas.openxmlformats.org/presentationml/2006/main" show="0">
-  <p:cSld>
-    <p:spTree>
-      <p:nvGrpSpPr>
-        <p:cNvPr id="1" name=""/>
-        <p:cNvGrpSpPr/>
-        <p:nvPr/>
-      </p:nvGrpSpPr>
-      <p:grpSpPr>
-        <a:xfrm>
-          <a:off x="0" y="0"/>
-          <a:ext cx="0" cy="0"/>
-          <a:chOff x="0" y="0"/>
-          <a:chExt cx="0" cy="0"/>
-        </a:xfrm>
-      </p:grpSpPr>
-      <p:pic>
-        <p:nvPicPr>
-          <p:cNvPr id="349" name="Picture 348"/>
-          <p:cNvPicPr/>
-          <p:nvPr/>
-        </p:nvPicPr>
-        <p:blipFill>
-          <a:blip r:embed="rId3"/>
-          <a:stretch/>
-        </p:blipFill>
-        <p:spPr>
-          <a:xfrm>
-            <a:off x="0" y="3017520"/>
-            <a:ext cx="4694760" cy="4542120"/>
-          </a:xfrm>
-          <a:prstGeom prst="rect">
-            <a:avLst/>
-          </a:prstGeom>
-          <a:ln w="0">
-            <a:noFill/>
-          </a:ln>
-        </p:spPr>
-      </p:pic>
-      <p:sp>
-        <p:nvSpPr>
-          <p:cNvPr id="350" name="TextShape 1"/>
-          <p:cNvSpPr txBox="1"/>
-          <p:nvPr/>
-        </p:nvSpPr>
-        <p:spPr>
-          <a:xfrm>
-            <a:off x="182880" y="42840"/>
-            <a:ext cx="9966960" cy="1054440"/>
-          </a:xfrm>
-          <a:prstGeom prst="rect">
-            <a:avLst/>
-          </a:prstGeom>
-          <a:noFill/>
-          <a:ln w="0">
-            <a:noFill/>
-          </a:ln>
-        </p:spPr>
-        <p:txBody>
-          <a:bodyPr anchor="ctr">
-            <a:noAutofit/>
-          </a:bodyPr>
-          <a:lstStyle/>
-          <a:p>
-            <a:pPr algn="r" rtl="1">
-              <a:buClr>
-                <a:srgbClr val="000000"/>
-              </a:buClr>
-              <a:buSzPct val="45000"/>
-            </a:pPr>
-            <a:r>
-              <a:rPr lang="he-IL" sz="6000" b="0" strike="noStrike" spc="-1">
-                <a:latin typeface="Arial"/>
-                <a:cs typeface="David"/>
-              </a:rPr>
-              <a:t>חלוקה של “עוגה” עם ערך שלילי</a:t>
-            </a:r>
-            <a:endParaRPr lang="en-US" sz="6000" b="0" strike="noStrike" spc="-1">
-              <a:latin typeface="Arial"/>
-            </a:endParaRPr>
-          </a:p>
-        </p:txBody>
-      </p:sp>
-      <p:sp>
-        <p:nvSpPr>
-          <p:cNvPr id="351" name="TextShape 2"/>
-          <p:cNvSpPr txBox="1"/>
-          <p:nvPr/>
-        </p:nvSpPr>
-        <p:spPr>
-          <a:xfrm>
-            <a:off x="0" y="1097280"/>
-            <a:ext cx="10080720" cy="6462360"/>
-          </a:xfrm>
-          <a:prstGeom prst="rect">
-            <a:avLst/>
-          </a:prstGeom>
-          <a:noFill/>
-          <a:ln w="0">
-            <a:noFill/>
-          </a:ln>
-        </p:spPr>
-        <p:txBody>
-          <a:bodyPr lIns="90000" tIns="45000" rIns="90000" bIns="45000">
-            <a:noAutofit/>
-          </a:bodyPr>
-          <a:lstStyle/>
-          <a:p>
-            <a:pPr algn="r" rtl="1"/>
-            <a:r>
-              <a:rPr lang="he-IL" sz="4000" b="0" strike="noStrike" spc="-1">
-                <a:solidFill>
-                  <a:srgbClr val="0000CC"/>
-                </a:solidFill>
-                <a:latin typeface="Arial"/>
-                <a:cs typeface="Arial"/>
-              </a:rPr>
-              <a:t>דוגמאות ל"עוגות" עם ערך שלילי:</a:t>
-            </a:r>
-            <a:endParaRPr lang="en-US" sz="4000" b="0" strike="noStrike" spc="-1">
-              <a:latin typeface="Arial"/>
-            </a:endParaRPr>
-          </a:p>
-          <a:p>
-            <a:pPr marL="216000" indent="-216000" algn="r" rtl="1">
-              <a:buClr>
-                <a:srgbClr val="000000"/>
-              </a:buClr>
-              <a:buSzPct val="45000"/>
-              <a:buFont typeface="Wingdings" charset="2"/>
-              <a:buChar char=""/>
-            </a:pPr>
-            <a:r>
-              <a:rPr lang="he-IL" sz="4000" b="0" strike="noStrike" spc="-1">
-                <a:solidFill>
-                  <a:srgbClr val="990099"/>
-                </a:solidFill>
-                <a:latin typeface="Arial"/>
-                <a:cs typeface="Arial"/>
-              </a:rPr>
-              <a:t>העוגה נשרפה/כולם בדיאטה, אבל צריך לאכול כי לא נעים מהמארחים.</a:t>
-            </a:r>
-            <a:endParaRPr lang="en-US" sz="4000" b="0" strike="noStrike" spc="-1">
-              <a:latin typeface="Arial"/>
-            </a:endParaRPr>
-          </a:p>
-          <a:p>
-            <a:pPr marL="216000" indent="-216000" algn="r" rtl="1">
-              <a:buClr>
-                <a:srgbClr val="000000"/>
-              </a:buClr>
-              <a:buSzPct val="45000"/>
-              <a:buFont typeface="Wingdings" charset="2"/>
-              <a:buChar char=""/>
-            </a:pPr>
-            <a:r>
-              <a:rPr lang="he-IL" sz="4000" b="0" strike="noStrike" spc="-1">
-                <a:solidFill>
-                  <a:srgbClr val="990099"/>
-                </a:solidFill>
-                <a:latin typeface="Arial"/>
-                <a:cs typeface="Arial"/>
-              </a:rPr>
-              <a:t>ה”עוגה” היא משל לקרקע </a:t>
-            </a:r>
-            <a:br/>
-            <a:r>
-              <a:rPr lang="he-IL" sz="4000" b="0" strike="noStrike" spc="-1">
-                <a:solidFill>
-                  <a:srgbClr val="990099"/>
-                </a:solidFill>
-                <a:latin typeface="Arial"/>
-                <a:cs typeface="Arial"/>
-              </a:rPr>
-              <a:t>שצריך לטפל בה</a:t>
-            </a:r>
-            <a:br/>
-            <a:r>
-              <a:rPr lang="en-US" sz="4000" b="0" strike="noStrike" spc="-1">
-                <a:solidFill>
-                  <a:srgbClr val="990099"/>
-                </a:solidFill>
-                <a:latin typeface="Arial"/>
-              </a:rPr>
-              <a:t>(למשל לכסח את הדשא).</a:t>
-            </a:r>
-            <a:endParaRPr lang="en-US" sz="4000" b="0" strike="noStrike" spc="-1">
-              <a:latin typeface="Arial"/>
-            </a:endParaRPr>
-          </a:p>
-          <a:p>
-            <a:pPr marL="216000" indent="-216000" algn="r" rtl="1">
-              <a:buClr>
-                <a:srgbClr val="000000"/>
-              </a:buClr>
-              <a:buSzPct val="45000"/>
-              <a:buFont typeface="Wingdings" charset="2"/>
-              <a:buChar char=""/>
-            </a:pPr>
-            <a:r>
-              <a:rPr lang="he-IL" sz="4000" b="0" strike="noStrike" spc="-1">
-                <a:solidFill>
-                  <a:srgbClr val="990099"/>
-                </a:solidFill>
-                <a:latin typeface="Arial"/>
-                <a:cs typeface="Arial"/>
-              </a:rPr>
-              <a:t>ה"עוגה" היא משל לזמן</a:t>
-            </a:r>
-            <a:br/>
-            <a:r>
-              <a:rPr lang="he-IL" sz="4000" b="0" strike="noStrike" spc="-1">
-                <a:solidFill>
-                  <a:srgbClr val="990099"/>
-                </a:solidFill>
-                <a:latin typeface="Arial"/>
-                <a:cs typeface="Arial"/>
-              </a:rPr>
-              <a:t>שבו צריך לבצע תורנות.</a:t>
-            </a:r>
-            <a:endParaRPr lang="en-US" sz="4000" b="0" strike="noStrike" spc="-1">
-              <a:latin typeface="Arial"/>
-            </a:endParaRPr>
-          </a:p>
-          <a:p>
-            <a:pPr algn="r" rtl="1"/>
-            <a:r>
-              <a:rPr lang="he-IL" sz="4000" b="0" strike="noStrike" spc="-1">
-                <a:solidFill>
-                  <a:srgbClr val="0000CC"/>
-                </a:solidFill>
-                <a:latin typeface="Arial"/>
-                <a:cs typeface="Arial"/>
-              </a:rPr>
-              <a:t>כל שחקן מעדיף פרוסה </a:t>
-            </a:r>
-            <a:r>
-              <a:rPr lang="he-IL" sz="4000" b="1" strike="noStrike" spc="-1">
-                <a:solidFill>
-                  <a:srgbClr val="0000CC"/>
-                </a:solidFill>
-                <a:latin typeface="Arial"/>
-                <a:cs typeface="Arial"/>
-              </a:rPr>
-              <a:t>ריקה</a:t>
-            </a:r>
-            <a:r>
-              <a:rPr lang="en-US" sz="4000" b="0" strike="noStrike" spc="-1">
-                <a:solidFill>
-                  <a:srgbClr val="0000CC"/>
-                </a:solidFill>
-                <a:latin typeface="Arial"/>
-              </a:rPr>
-              <a:t>.</a:t>
-            </a:r>
-            <a:br/>
-            <a:r>
-              <a:rPr lang="he-IL" sz="4000" b="0" strike="noStrike" spc="-1">
-                <a:solidFill>
-                  <a:srgbClr val="009900"/>
-                </a:solidFill>
-                <a:latin typeface="Arial"/>
-                <a:cs typeface="Arial"/>
-              </a:rPr>
-              <a:t>תנאי ספרנר מתקיים --&gt; </a:t>
-            </a:r>
-            <a:br/>
-            <a:r>
-              <a:rPr lang="he-IL" sz="4000" b="0" strike="noStrike" spc="-1">
-                <a:solidFill>
-                  <a:srgbClr val="009900"/>
-                </a:solidFill>
-                <a:latin typeface="Arial"/>
-                <a:cs typeface="Arial"/>
-              </a:rPr>
-              <a:t>קיימת חלוקה ללא קנאה!</a:t>
-            </a:r>
-            <a:endParaRPr lang="en-US" sz="4000" b="0" strike="noStrike" spc="-1">
-              <a:latin typeface="Arial"/>
-            </a:endParaRPr>
-          </a:p>
-        </p:txBody>
-      </p:sp>
-    </p:spTree>
-  </p:cSld>
-  <p:clrMapOvr>
-    <a:masterClrMapping/>
-  </p:clrMapOvr>
-  <p:timing>
-    <p:tnLst>
-      <p:par>
-        <p:cTn id="1" dur="indefinite" restart="never" nodeType="tmRoot">
-          <p:childTnLst>
-            <p:seq>
-              <p:cTn id="2" dur="indefinite" nodeType="mainSeq">
-                <p:childTnLst>
-                  <p:par>
-                    <p:cTn id="3" fill="hold">
-                      <p:stCondLst>
-                        <p:cond delay="indefinite"/>
-                      </p:stCondLst>
-                      <p:childTnLst>
-                        <p:par>
-                          <p:cTn id="4" fill="hold">
-                            <p:stCondLst>
-                              <p:cond delay="0"/>
-                            </p:stCondLst>
-                            <p:childTnLst>
-                              <p:par>
-                                <p:cTn id="5" presetID="1" presetClass="entr" fill="hold" nodeType="clickEffect">
-                                  <p:stCondLst>
-                                    <p:cond delay="0"/>
-                                  </p:stCondLst>
-                                  <p:childTnLst>
-                                    <p:set>
-                                      <p:cBhvr>
-                                        <p:cTn id="6" dur="1" fill="hold">
-                                          <p:stCondLst>
-                                            <p:cond delay="0"/>
-                                          </p:stCondLst>
-                                        </p:cTn>
-                                        <p:tgtEl>
-                                          <p:spTgt spid="351">
-                                            <p:txEl>
-                                              <p:pRg st="0" end="0"/>
-                                            </p:txEl>
-                                          </p:spTgt>
-                                        </p:tgtEl>
-                                        <p:attrNameLst>
-                                          <p:attrName>style.visibility</p:attrName>
-                                        </p:attrNameLst>
-                                      </p:cBhvr>
-                                      <p:to>
-                                        <p:strVal val="visible"/>
-                                      </p:to>
-                                    </p:set>
-                                  </p:childTnLst>
-                                </p:cTn>
-                              </p:par>
-                            </p:childTnLst>
-                          </p:cTn>
-                        </p:par>
-                      </p:childTnLst>
-                    </p:cTn>
-                  </p:par>
-                  <p:par>
-                    <p:cTn id="7" fill="hold">
-                      <p:stCondLst>
-                        <p:cond delay="indefinite"/>
-                      </p:stCondLst>
-                      <p:childTnLst>
-                        <p:par>
-                          <p:cTn id="8" fill="hold">
-                            <p:stCondLst>
-                              <p:cond delay="0"/>
-                            </p:stCondLst>
-                            <p:childTnLst>
-                              <p:par>
-                                <p:cTn id="9" presetID="1" presetClass="entr" fill="hold" nodeType="clickEffect">
-                                  <p:stCondLst>
-                                    <p:cond delay="0"/>
-                                  </p:stCondLst>
-                                  <p:childTnLst>
-                                    <p:set>
-                                      <p:cBhvr>
-                                        <p:cTn id="10" dur="1" fill="hold">
-                                          <p:stCondLst>
-                                            <p:cond delay="0"/>
-                                          </p:stCondLst>
-                                        </p:cTn>
-                                        <p:tgtEl>
-                                          <p:spTgt spid="351">
-                                            <p:txEl>
-                                              <p:pRg st="1" end="1"/>
-                                            </p:txEl>
-                                          </p:spTgt>
-                                        </p:tgtEl>
-                                        <p:attrNameLst>
-                                          <p:attrName>style.visibility</p:attrName>
-                                        </p:attrNameLst>
-                                      </p:cBhvr>
-                                      <p:to>
-                                        <p:strVal val="visible"/>
-                                      </p:to>
-                                    </p:set>
-                                  </p:childTnLst>
-                                </p:cTn>
-                              </p:par>
-                            </p:childTnLst>
-                          </p:cTn>
-                        </p:par>
-                      </p:childTnLst>
-                    </p:cTn>
-                  </p:par>
-                  <p:par>
-                    <p:cTn id="11" fill="hold">
-                      <p:stCondLst>
-                        <p:cond delay="indefinite"/>
-                      </p:stCondLst>
-                      <p:childTnLst>
-                        <p:par>
-                          <p:cTn id="12" fill="hold">
-                            <p:stCondLst>
-                              <p:cond delay="0"/>
-                            </p:stCondLst>
-                            <p:childTnLst>
-                              <p:par>
-                                <p:cTn id="13" presetID="1" presetClass="entr" fill="hold" nodeType="clickEffect">
-                                  <p:stCondLst>
-                                    <p:cond delay="0"/>
-                                  </p:stCondLst>
-                                  <p:childTnLst>
-                                    <p:set>
-                                      <p:cBhvr>
-                                        <p:cTn id="14" dur="1" fill="hold">
-                                          <p:stCondLst>
-                                            <p:cond delay="0"/>
-                                          </p:stCondLst>
-                                        </p:cTn>
-                                        <p:tgtEl>
-                                          <p:spTgt spid="351">
-                                            <p:txEl>
-                                              <p:pRg st="2" end="2"/>
-                                            </p:txEl>
-                                          </p:spTgt>
-                                        </p:tgtEl>
-                                        <p:attrNameLst>
-                                          <p:attrName>style.visibility</p:attrName>
-                                        </p:attrNameLst>
-                                      </p:cBhvr>
-                                      <p:to>
-                                        <p:strVal val="visible"/>
-                                      </p:to>
-                                    </p:set>
-                                  </p:childTnLst>
-                                </p:cTn>
-                              </p:par>
-                            </p:childTnLst>
-                          </p:cTn>
-                        </p:par>
-                      </p:childTnLst>
-                    </p:cTn>
-                  </p:par>
-                  <p:par>
-                    <p:cTn id="15" fill="hold">
-                      <p:stCondLst>
-                        <p:cond delay="indefinite"/>
-                      </p:stCondLst>
-                      <p:childTnLst>
-                        <p:par>
-                          <p:cTn id="16" fill="hold">
-                            <p:stCondLst>
-                              <p:cond delay="0"/>
-                            </p:stCondLst>
-                            <p:childTnLst>
-                              <p:par>
-                                <p:cTn id="17" presetID="1" presetClass="entr" fill="hold" nodeType="clickEffect">
-                                  <p:stCondLst>
-                                    <p:cond delay="0"/>
-                                  </p:stCondLst>
-                                  <p:childTnLst>
-                                    <p:set>
-                                      <p:cBhvr>
-                                        <p:cTn id="18" dur="1" fill="hold">
-                                          <p:stCondLst>
-                                            <p:cond delay="0"/>
-                                          </p:stCondLst>
-                                        </p:cTn>
-                                        <p:tgtEl>
-                                          <p:spTgt spid="351">
-                                            <p:txEl>
-                                              <p:pRg st="3" end="3"/>
-                                            </p:txEl>
-                                          </p:spTgt>
-                                        </p:tgtEl>
-                                        <p:attrNameLst>
-                                          <p:attrName>style.visibility</p:attrName>
-                                        </p:attrNameLst>
-                                      </p:cBhvr>
-                                      <p:to>
-                                        <p:strVal val="visible"/>
-                                      </p:to>
-                                    </p:set>
-                                  </p:childTnLst>
-                                </p:cTn>
-                              </p:par>
-                            </p:childTnLst>
-                          </p:cTn>
-                        </p:par>
-                      </p:childTnLst>
-                    </p:cTn>
-                  </p:par>
-                  <p:par>
-                    <p:cTn id="19" fill="hold">
-                      <p:stCondLst>
-                        <p:cond delay="indefinite"/>
-                      </p:stCondLst>
-                      <p:childTnLst>
-                        <p:par>
-                          <p:cTn id="20" fill="hold">
-                            <p:stCondLst>
-                              <p:cond delay="0"/>
-                            </p:stCondLst>
-                            <p:childTnLst>
-                              <p:par>
-                                <p:cTn id="21" presetID="1" presetClass="entr" fill="hold" nodeType="clickEffect">
-                                  <p:stCondLst>
-                                    <p:cond delay="0"/>
-                                  </p:stCondLst>
-                                  <p:childTnLst>
-                                    <p:set>
-                                      <p:cBhvr>
-                                        <p:cTn id="22" dur="1" fill="hold">
-                                          <p:stCondLst>
-                                            <p:cond delay="0"/>
-                                          </p:stCondLst>
-                                        </p:cTn>
-                                        <p:tgtEl>
-                                          <p:spTgt spid="351">
-                                            <p:txEl>
-                                              <p:pRg st="4" end="4"/>
-                                            </p:txEl>
-                                          </p:spTgt>
-                                        </p:tgtEl>
-                                        <p:attrNameLst>
-                                          <p:attrName>style.visibility</p:attrName>
-                                        </p:attrNameLst>
-                                      </p:cBhvr>
-                                      <p:to>
-                                        <p:strVal val="visible"/>
-                                      </p:to>
-                                    </p:set>
-                                  </p:childTnLst>
-                                </p:cTn>
-                              </p:par>
-                            </p:childTnLst>
-                          </p:cTn>
-                        </p:par>
-                      </p:childTnLst>
-                    </p:cTn>
-                  </p:par>
-                  <p:par>
-                    <p:cTn id="23" fill="hold">
-                      <p:stCondLst>
-                        <p:cond delay="indefinite"/>
-                      </p:stCondLst>
-                      <p:childTnLst>
-                        <p:par>
-                          <p:cTn id="24" fill="hold">
-                            <p:stCondLst>
-                              <p:cond delay="0"/>
-                            </p:stCondLst>
-                            <p:childTnLst>
-                              <p:par>
-                                <p:cTn id="25" presetID="1" presetClass="entr" fill="hold" nodeType="clickEffect">
-                                  <p:stCondLst>
-                                    <p:cond delay="0"/>
-                                  </p:stCondLst>
-                                  <p:childTnLst>
-                                    <p:set>
-                                      <p:cBhvr>
-                                        <p:cTn id="26" dur="1" fill="hold">
-                                          <p:stCondLst>
-                                            <p:cond delay="0"/>
-                                          </p:stCondLst>
-                                        </p:cTn>
-                                        <p:tgtEl>
-                                          <p:spTgt spid="349"/>
-                                        </p:tgtEl>
-                                        <p:attrNameLst>
-                                          <p:attrName>style.visibility</p:attrName>
-                                        </p:attrNameLst>
-                                      </p:cBhvr>
-                                      <p:to>
-                                        <p:strVal val="visible"/>
-                                      </p:to>
-                                    </p:set>
-                                  </p:childTnLst>
-                                </p:cTn>
-                              </p:par>
-                            </p:childTnLst>
-                          </p:cTn>
-                        </p:par>
-                      </p:childTnLst>
-                    </p:cTn>
-                  </p:par>
-                </p:childTnLst>
-              </p:cTn>
-              <p:prevCondLst>
-                <p:cond evt="onPrev" delay="0">
-                  <p:tgtEl>
-                    <p:sldTgt/>
-                  </p:tgtEl>
-                </p:cond>
-              </p:prevCondLst>
-              <p:nextCondLst>
-                <p:cond evt="onNext" delay="0">
-                  <p:tgtEl>
-                    <p:sldTgt/>
-                  </p:tgtEl>
-                </p:cond>
-              </p:nextCondLst>
-            </p:seq>
-          </p:childTnLst>
-        </p:cTn>
-      </p:par>
-    </p:tnLst>
-  </p:timing>
-</p:sld>
-</file>
-
-<file path=ppt/slides/slide15.xml><?xml version="1.0" encoding="utf-8"?>
 <p:sld xmlns:a="http://schemas.openxmlformats.org/drawingml/2006/main" xmlns:r="http://schemas.openxmlformats.org/officeDocument/2006/relationships" xmlns:p="http://schemas.openxmlformats.org/presentationml/2006/main">
   <p:cSld>
     <p:spTree>
@@ -12719,7 +11978,7 @@
 </p:sld>
 </file>
 
-<file path=ppt/slides/slide16.xml><?xml version="1.0" encoding="utf-8"?>
+<file path=ppt/slides/slide15.xml><?xml version="1.0" encoding="utf-8"?>
 <p:sld xmlns:a="http://schemas.openxmlformats.org/drawingml/2006/main" xmlns:r="http://schemas.openxmlformats.org/officeDocument/2006/relationships" xmlns:p="http://schemas.openxmlformats.org/presentationml/2006/main">
   <p:cSld>
     <p:spTree>
@@ -13350,7 +12609,7 @@
 </p:sld>
 </file>
 
-<file path=ppt/slides/slide17.xml><?xml version="1.0" encoding="utf-8"?>
+<file path=ppt/slides/slide16.xml><?xml version="1.0" encoding="utf-8"?>
 <p:sld xmlns:a="http://schemas.openxmlformats.org/drawingml/2006/main" xmlns:r="http://schemas.openxmlformats.org/officeDocument/2006/relationships" xmlns:p="http://schemas.openxmlformats.org/presentationml/2006/main" show="0">
   <p:cSld>
     <p:spTree>
@@ -14987,7 +14246,7 @@
     <mc:Choice Requires="p14">
       <p:transition spd="slow" p14:dur="3000"/>
     </mc:Choice>
-    <mc:Fallback xmlns:p15="http://schemas.microsoft.com/office/powerpoint/2012/main" xmlns="">
+    <mc:Fallback xmlns="" xmlns:p15="http://schemas.microsoft.com/office/powerpoint/2012/main">
       <p:transition spd="slow"/>
     </mc:Fallback>
   </mc:AlternateContent>
@@ -15908,7 +15167,21 @@
                 <a:latin typeface="Arial"/>
                 <a:ea typeface="WenQuanYi Micro Hei"/>
               </a:rPr>
-              <a:t> חותך 3 חתיכות שוות בעיניו.</a:t>
+              <a:t> חותך 3</a:t>
+            </a:r>
+            <a:r>
+              <a:rPr lang="he-IL" sz="3200" b="0" strike="noStrike" spc="-1">
+                <a:latin typeface="Arial"/>
+                <a:ea typeface="WenQuanYi Micro Hei"/>
+              </a:rPr>
+              <a:t> </a:t>
+            </a:r>
+            <a:r>
+              <a:rPr lang="en-US" sz="3200" b="0" strike="noStrike" spc="-1">
+                <a:latin typeface="Arial"/>
+                <a:ea typeface="WenQuanYi Micro Hei"/>
+              </a:rPr>
+              <a:t>חתיכות שוות בעיניו.</a:t>
             </a:r>
             <a:r>
               <a:rPr lang="en-US" sz="3200" b="0" strike="noStrike" spc="-1">
@@ -20256,7 +19529,7 @@
     <mc:Choice Requires="p14">
       <p:transition spd="slow" p14:dur="3000"/>
     </mc:Choice>
-    <mc:Fallback xmlns:p15="http://schemas.microsoft.com/office/powerpoint/2012/main" xmlns="">
+    <mc:Fallback xmlns="" xmlns:p15="http://schemas.microsoft.com/office/powerpoint/2012/main">
       <p:transition spd="slow"/>
     </mc:Fallback>
   </mc:AlternateContent>
@@ -23306,7 +22579,7 @@
     <mc:Choice Requires="p14">
       <p:transition spd="slow" p14:dur="3000"/>
     </mc:Choice>
-    <mc:Fallback xmlns:p15="http://schemas.microsoft.com/office/powerpoint/2012/main" xmlns="">
+    <mc:Fallback xmlns="" xmlns:p15="http://schemas.microsoft.com/office/powerpoint/2012/main">
       <p:transition spd="slow"/>
     </mc:Fallback>
   </mc:AlternateContent>
@@ -27896,7 +27169,19 @@
               <a:rPr lang="en-US" sz="3600" b="0" strike="noStrike" spc="-1">
                 <a:latin typeface="Arial"/>
               </a:rPr>
-              <a:t> – </a:t>
+              <a:t> </a:t>
+            </a:r>
+            <a:r>
+              <a:rPr lang="he-IL" sz="3600" b="0" strike="noStrike" spc="-1">
+                <a:latin typeface="Arial"/>
+              </a:rPr>
+              <a:t> - </a:t>
+            </a:r>
+            <a:r>
+              <a:rPr lang="en-US" sz="3600" b="0" strike="noStrike" spc="-1">
+                <a:latin typeface="Arial"/>
+              </a:rPr>
+              <a:t> </a:t>
             </a:r>
             <a:r>
               <a:rPr lang="he-IL" sz="3600" b="1" strike="noStrike" spc="-1">
@@ -27944,7 +27229,19 @@
               <a:rPr lang="en-US" sz="3600" b="0" strike="noStrike" spc="-1">
                 <a:latin typeface="Arial"/>
               </a:rPr>
-              <a:t> – </a:t>
+              <a:t> </a:t>
+            </a:r>
+            <a:r>
+              <a:rPr lang="he-IL" sz="3600" b="0" strike="noStrike" spc="-1">
+                <a:latin typeface="Arial"/>
+              </a:rPr>
+              <a:t> - </a:t>
+            </a:r>
+            <a:r>
+              <a:rPr lang="en-US" sz="3600" b="0" strike="noStrike" spc="-1">
+                <a:latin typeface="Arial"/>
+              </a:rPr>
+              <a:t> </a:t>
             </a:r>
             <a:r>
               <a:rPr lang="he-IL" sz="3600" b="1" strike="noStrike" spc="-1">
@@ -27992,7 +27289,19 @@
               <a:rPr lang="en-US" sz="3600" b="0" strike="noStrike" spc="-1">
                 <a:latin typeface="Arial"/>
               </a:rPr>
-              <a:t> – </a:t>
+              <a:t> </a:t>
+            </a:r>
+            <a:r>
+              <a:rPr lang="he-IL" sz="3600" b="0" strike="noStrike" spc="-1">
+                <a:latin typeface="Arial"/>
+              </a:rPr>
+              <a:t> - </a:t>
+            </a:r>
+            <a:r>
+              <a:rPr lang="en-US" sz="3600" b="0" strike="noStrike" spc="-1">
+                <a:latin typeface="Arial"/>
+              </a:rPr>
+              <a:t> </a:t>
             </a:r>
             <a:r>
               <a:rPr lang="he-IL" sz="3600" b="1" strike="noStrike" spc="-1">
@@ -28022,7 +27331,7 @@
                 <a:latin typeface="Arial"/>
                 <a:cs typeface="Arial"/>
               </a:rPr>
-              <a:t>באופן כללי – </a:t>
+              <a:t>באופן כללי - </a:t>
             </a:r>
             <a:r>
               <a:rPr lang="he-IL" sz="3600" b="1" strike="noStrike" spc="-1">
